--- a/docs/Intro to GitHub Copilot CLI ver 0.pptx
+++ b/docs/Intro to GitHub Copilot CLI ver 0.pptx
@@ -3019,7 +3019,7 @@
               <a:buNone/>
             </a:pPr>
             <a:r>
-              <a:rPr lang="en-US" sz="760" dirty="0">
+              <a:rPr lang="en-US" sz="760">
                 <a:solidFill>
                   <a:srgbClr val="E6EDF3"/>
                 </a:solidFill>
@@ -3027,7 +3027,7 @@
                 <a:ea typeface="Consolas" pitchFamily="34" charset="-122"/>
                 <a:cs typeface="Consolas" pitchFamily="34" charset="-120"/>
               </a:rPr>
-              <a:t>gh copilot suggest "find large files &gt; 100MB"</a:t>
+              <a:t>copilot --yolo -p "find large files over 100MB"</a:t>
             </a:r>
             <a:endParaRPr lang="en-US" sz="760" dirty="0"/>
           </a:p>
